--- a/output_pptx/What_Child_Is_This.pptx
+++ b/output_pptx/What_Child_Is_This.pptx
@@ -3121,8 +3121,8 @@
         </p:nvSpPr>
         <p:spPr>
           <a:xfrm>
-            <a:off x="594360" y="2258568"/>
-            <a:ext cx="11002975" cy="685800"/>
+            <a:off x="640080" y="2052828"/>
+            <a:ext cx="10911535" cy="731520"/>
           </a:xfrm>
           <a:prstGeom prst="rect">
             <a:avLst/>
@@ -3137,7 +3137,7 @@
           <a:p>
             <a:pPr algn="ctr"/>
             <a:r>
-              <a:rPr sz="4400" b="1" i="0">
+              <a:rPr sz="4800" b="1" i="0">
                 <a:solidFill>
                   <a:srgbClr val="FFFFFF"/>
                 </a:solidFill>
@@ -3156,8 +3156,8 @@
         </p:nvSpPr>
         <p:spPr>
           <a:xfrm>
-            <a:off x="594360" y="2980944"/>
-            <a:ext cx="11002975" cy="347472"/>
+            <a:off x="640080" y="2985516"/>
+            <a:ext cx="10911535" cy="731520"/>
           </a:xfrm>
           <a:prstGeom prst="rect">
             <a:avLst/>
@@ -3172,83 +3172,13 @@
           <a:p>
             <a:pPr algn="ctr"/>
             <a:r>
-              <a:rPr sz="2200" b="0" i="1">
-                <a:solidFill>
-                  <a:srgbClr val="8C8C8C"/>
-                </a:solidFill>
-                <a:latin typeface="Arial"/>
-              </a:rPr>
-              <a:t/>
-            </a:r>
-          </a:p>
-        </p:txBody>
-      </p:sp>
-      <p:sp>
-        <p:nvSpPr>
-          <p:cNvPr id="4" name="TextBox 3"/>
-          <p:cNvSpPr txBox="1"/>
-          <p:nvPr/>
-        </p:nvSpPr>
-        <p:spPr>
-          <a:xfrm>
-            <a:off x="594360" y="3529584"/>
-            <a:ext cx="11002975" cy="685800"/>
-          </a:xfrm>
-          <a:prstGeom prst="rect">
-            <a:avLst/>
-          </a:prstGeom>
-          <a:noFill/>
-        </p:spPr>
-        <p:txBody>
-          <a:bodyPr wrap="square">
-            <a:spAutoFit/>
-          </a:bodyPr>
-          <a:lstStyle/>
-          <a:p>
-            <a:pPr algn="ctr"/>
-            <a:r>
-              <a:rPr sz="4400" b="1" i="0">
+              <a:rPr sz="4800" b="1" i="0">
                 <a:solidFill>
                   <a:srgbClr val="FFFFFF"/>
                 </a:solidFill>
                 <a:latin typeface="Arial"/>
               </a:rPr>
               <a:t>Que criança é esta que repousa</a:t>
-            </a:r>
-          </a:p>
-        </p:txBody>
-      </p:sp>
-      <p:sp>
-        <p:nvSpPr>
-          <p:cNvPr id="5" name="TextBox 4"/>
-          <p:cNvSpPr txBox="1"/>
-          <p:nvPr/>
-        </p:nvSpPr>
-        <p:spPr>
-          <a:xfrm>
-            <a:off x="594360" y="4251960"/>
-            <a:ext cx="11002975" cy="347472"/>
-          </a:xfrm>
-          <a:prstGeom prst="rect">
-            <a:avLst/>
-          </a:prstGeom>
-          <a:noFill/>
-        </p:spPr>
-        <p:txBody>
-          <a:bodyPr wrap="square">
-            <a:spAutoFit/>
-          </a:bodyPr>
-          <a:lstStyle/>
-          <a:p>
-            <a:pPr algn="ctr"/>
-            <a:r>
-              <a:rPr sz="2200" b="0" i="1">
-                <a:solidFill>
-                  <a:srgbClr val="8C8C8C"/>
-                </a:solidFill>
-                <a:latin typeface="Arial"/>
-              </a:rPr>
-              <a:t/>
             </a:r>
           </a:p>
         </p:txBody>
@@ -3287,8 +3217,8 @@
         </p:nvSpPr>
         <p:spPr>
           <a:xfrm>
-            <a:off x="594360" y="2258568"/>
-            <a:ext cx="11002975" cy="685800"/>
+            <a:off x="640080" y="2052828"/>
+            <a:ext cx="10911535" cy="731520"/>
           </a:xfrm>
           <a:prstGeom prst="rect">
             <a:avLst/>
@@ -3303,7 +3233,7 @@
           <a:p>
             <a:pPr algn="ctr"/>
             <a:r>
-              <a:rPr sz="3520" b="1" i="0">
+              <a:rPr sz="3800" b="1" i="0">
                 <a:solidFill>
                   <a:srgbClr val="FFFFFF"/>
                 </a:solidFill>
@@ -3322,8 +3252,8 @@
         </p:nvSpPr>
         <p:spPr>
           <a:xfrm>
-            <a:off x="594360" y="2980944"/>
-            <a:ext cx="11002975" cy="347472"/>
+            <a:off x="640080" y="2985516"/>
+            <a:ext cx="10911535" cy="731520"/>
           </a:xfrm>
           <a:prstGeom prst="rect">
             <a:avLst/>
@@ -3338,83 +3268,13 @@
           <a:p>
             <a:pPr algn="ctr"/>
             <a:r>
-              <a:rPr sz="2200" b="0" i="1">
-                <a:solidFill>
-                  <a:srgbClr val="8C8C8C"/>
-                </a:solidFill>
-                <a:latin typeface="Arial"/>
-              </a:rPr>
-              <a:t/>
-            </a:r>
-          </a:p>
-        </p:txBody>
-      </p:sp>
-      <p:sp>
-        <p:nvSpPr>
-          <p:cNvPr id="4" name="TextBox 3"/>
-          <p:cNvSpPr txBox="1"/>
-          <p:nvPr/>
-        </p:nvSpPr>
-        <p:spPr>
-          <a:xfrm>
-            <a:off x="594360" y="3529584"/>
-            <a:ext cx="11002975" cy="685800"/>
-          </a:xfrm>
-          <a:prstGeom prst="rect">
-            <a:avLst/>
-          </a:prstGeom>
-          <a:noFill/>
-        </p:spPr>
-        <p:txBody>
-          <a:bodyPr wrap="square">
-            <a:spAutoFit/>
-          </a:bodyPr>
-          <a:lstStyle/>
-          <a:p>
-            <a:pPr algn="ctr"/>
-            <a:r>
-              <a:rPr sz="4022" b="1" i="0">
+              <a:rPr sz="4300" b="1" i="0">
                 <a:solidFill>
                   <a:srgbClr val="FFFFFF"/>
                 </a:solidFill>
                 <a:latin typeface="Arial"/>
               </a:rPr>
               <a:t>O Rei dos reis, a salvação nos traz</a:t>
-            </a:r>
-          </a:p>
-        </p:txBody>
-      </p:sp>
-      <p:sp>
-        <p:nvSpPr>
-          <p:cNvPr id="5" name="TextBox 4"/>
-          <p:cNvSpPr txBox="1"/>
-          <p:nvPr/>
-        </p:nvSpPr>
-        <p:spPr>
-          <a:xfrm>
-            <a:off x="594360" y="4251960"/>
-            <a:ext cx="11002975" cy="347472"/>
-          </a:xfrm>
-          <a:prstGeom prst="rect">
-            <a:avLst/>
-          </a:prstGeom>
-          <a:noFill/>
-        </p:spPr>
-        <p:txBody>
-          <a:bodyPr wrap="square">
-            <a:spAutoFit/>
-          </a:bodyPr>
-          <a:lstStyle/>
-          <a:p>
-            <a:pPr algn="ctr"/>
-            <a:r>
-              <a:rPr sz="2200" b="0" i="1">
-                <a:solidFill>
-                  <a:srgbClr val="8C8C8C"/>
-                </a:solidFill>
-                <a:latin typeface="Arial"/>
-              </a:rPr>
-              <a:t/>
             </a:r>
           </a:p>
         </p:txBody>
@@ -3453,8 +3313,8 @@
         </p:nvSpPr>
         <p:spPr>
           <a:xfrm>
-            <a:off x="594360" y="2894076"/>
-            <a:ext cx="11002975" cy="685800"/>
+            <a:off x="640080" y="2702052"/>
+            <a:ext cx="10911535" cy="731520"/>
           </a:xfrm>
           <a:prstGeom prst="rect">
             <a:avLst/>
@@ -3469,48 +3329,13 @@
           <a:p>
             <a:pPr algn="ctr"/>
             <a:r>
-              <a:rPr sz="3520" b="1" i="0">
+              <a:rPr sz="3800" b="1" i="0">
                 <a:solidFill>
                   <a:srgbClr val="FFFFFF"/>
                 </a:solidFill>
                 <a:latin typeface="Arial"/>
               </a:rPr>
               <a:t>Deixai os corações amorosos entronizá-Lo</a:t>
-            </a:r>
-          </a:p>
-        </p:txBody>
-      </p:sp>
-      <p:sp>
-        <p:nvSpPr>
-          <p:cNvPr id="3" name="TextBox 2"/>
-          <p:cNvSpPr txBox="1"/>
-          <p:nvPr/>
-        </p:nvSpPr>
-        <p:spPr>
-          <a:xfrm>
-            <a:off x="594360" y="3616452"/>
-            <a:ext cx="11002975" cy="347472"/>
-          </a:xfrm>
-          <a:prstGeom prst="rect">
-            <a:avLst/>
-          </a:prstGeom>
-          <a:noFill/>
-        </p:spPr>
-        <p:txBody>
-          <a:bodyPr wrap="square">
-            <a:spAutoFit/>
-          </a:bodyPr>
-          <a:lstStyle/>
-          <a:p>
-            <a:pPr algn="ctr"/>
-            <a:r>
-              <a:rPr sz="2200" b="0" i="1">
-                <a:solidFill>
-                  <a:srgbClr val="8C8C8C"/>
-                </a:solidFill>
-                <a:latin typeface="Arial"/>
-              </a:rPr>
-              <a:t/>
             </a:r>
           </a:p>
         </p:txBody>
@@ -3549,8 +3374,8 @@
         </p:nvSpPr>
         <p:spPr>
           <a:xfrm>
-            <a:off x="594360" y="1837944"/>
-            <a:ext cx="11002975" cy="685800"/>
+            <a:off x="640080" y="1650492"/>
+            <a:ext cx="10911535" cy="731520"/>
           </a:xfrm>
           <a:prstGeom prst="rect">
             <a:avLst/>
@@ -3565,7 +3390,7 @@
           <a:p>
             <a:pPr algn="ctr"/>
             <a:r>
-              <a:rPr sz="4400" b="1" i="0">
+              <a:rPr sz="4800" b="1" i="0">
                 <a:solidFill>
                   <a:srgbClr val="FFFFFF"/>
                 </a:solidFill>
@@ -3584,8 +3409,8 @@
         </p:nvSpPr>
         <p:spPr>
           <a:xfrm>
-            <a:off x="594360" y="2560320"/>
-            <a:ext cx="11002975" cy="384048"/>
+            <a:off x="640080" y="2418588"/>
+            <a:ext cx="10911535" cy="365760"/>
           </a:xfrm>
           <a:prstGeom prst="rect">
             <a:avLst/>
@@ -3602,7 +3427,7 @@
             <a:r>
               <a:rPr sz="2400" b="0" i="1">
                 <a:solidFill>
-                  <a:srgbClr val="B4B4B4"/>
+                  <a:srgbClr val="AAAAAA"/>
                 </a:solidFill>
                 <a:latin typeface="Arial"/>
               </a:rPr>
@@ -3619,8 +3444,8 @@
         </p:nvSpPr>
         <p:spPr>
           <a:xfrm>
-            <a:off x="594360" y="2980944"/>
-            <a:ext cx="11002975" cy="347472"/>
+            <a:off x="640080" y="2985516"/>
+            <a:ext cx="10911535" cy="731520"/>
           </a:xfrm>
           <a:prstGeom prst="rect">
             <a:avLst/>
@@ -3635,13 +3460,13 @@
           <a:p>
             <a:pPr algn="ctr"/>
             <a:r>
-              <a:rPr sz="2000" b="0" i="1">
-                <a:solidFill>
-                  <a:srgbClr val="8C8C8C"/>
+              <a:rPr sz="4800" b="1" i="0">
+                <a:solidFill>
+                  <a:srgbClr val="FFFFFF"/>
                 </a:solidFill>
                 <a:latin typeface="Arial"/>
               </a:rPr>
-              <a:t/>
+              <a:t>ねむるかーいばおけ</a:t>
             </a:r>
           </a:p>
         </p:txBody>
@@ -3654,8 +3479,8 @@
         </p:nvSpPr>
         <p:spPr>
           <a:xfrm>
-            <a:off x="594360" y="3529584"/>
-            <a:ext cx="11002975" cy="685800"/>
+            <a:off x="640080" y="3753612"/>
+            <a:ext cx="10911535" cy="365760"/>
           </a:xfrm>
           <a:prstGeom prst="rect">
             <a:avLst/>
@@ -3670,13 +3495,13 @@
           <a:p>
             <a:pPr algn="ctr"/>
             <a:r>
-              <a:rPr sz="4400" b="1" i="0">
-                <a:solidFill>
-                  <a:srgbClr val="FFFFFF"/>
+              <a:rPr sz="2400" b="0" i="1">
+                <a:solidFill>
+                  <a:srgbClr val="AAAAAA"/>
                 </a:solidFill>
                 <a:latin typeface="Arial"/>
               </a:rPr>
-              <a:t>ねむるかーいばおけ</a:t>
+              <a:t>nemuru kaiba oke</a:t>
             </a:r>
           </a:p>
         </p:txBody>
@@ -3689,8 +3514,8 @@
         </p:nvSpPr>
         <p:spPr>
           <a:xfrm>
-            <a:off x="594360" y="4251960"/>
-            <a:ext cx="11002975" cy="384048"/>
+            <a:off x="640080" y="4530852"/>
+            <a:ext cx="10911535" cy="310896"/>
           </a:xfrm>
           <a:prstGeom prst="rect">
             <a:avLst/>
@@ -3705,13 +3530,13 @@
           <a:p>
             <a:pPr algn="ctr"/>
             <a:r>
-              <a:rPr sz="2400" b="0" i="1">
-                <a:solidFill>
-                  <a:srgbClr val="B4B4B4"/>
+              <a:rPr sz="2000" b="0" i="1">
+                <a:solidFill>
+                  <a:srgbClr val="828282"/>
                 </a:solidFill>
                 <a:latin typeface="Arial"/>
               </a:rPr>
-              <a:t>nemuru kaiba oke</a:t>
+              <a:t>Onde boi e jumento se alimentam</a:t>
             </a:r>
           </a:p>
         </p:txBody>
@@ -3724,8 +3549,8 @@
         </p:nvSpPr>
         <p:spPr>
           <a:xfrm>
-            <a:off x="594360" y="4672584"/>
-            <a:ext cx="11002975" cy="347472"/>
+            <a:off x="640080" y="4896612"/>
+            <a:ext cx="10911535" cy="310896"/>
           </a:xfrm>
           <a:prstGeom prst="rect">
             <a:avLst/>
@@ -3742,11 +3567,11 @@
             <a:r>
               <a:rPr sz="2000" b="0" i="1">
                 <a:solidFill>
-                  <a:srgbClr val="8C8C8C"/>
+                  <a:srgbClr val="828282"/>
                 </a:solidFill>
                 <a:latin typeface="Arial"/>
               </a:rPr>
-              <a:t/>
+              <a:t>Bondoso cristão, pelos pecadores vem</a:t>
             </a:r>
           </a:p>
         </p:txBody>
@@ -3785,8 +3610,8 @@
         </p:nvSpPr>
         <p:spPr>
           <a:xfrm>
-            <a:off x="594360" y="1837944"/>
-            <a:ext cx="11002975" cy="685800"/>
+            <a:off x="640080" y="1650492"/>
+            <a:ext cx="10911535" cy="731520"/>
           </a:xfrm>
           <a:prstGeom prst="rect">
             <a:avLst/>
@@ -3801,7 +3626,7 @@
           <a:p>
             <a:pPr algn="ctr"/>
             <a:r>
-              <a:rPr sz="4400" b="1" i="0">
+              <a:rPr sz="4800" b="1" i="0">
                 <a:solidFill>
                   <a:srgbClr val="FFFFFF"/>
                 </a:solidFill>
@@ -3820,8 +3645,8 @@
         </p:nvSpPr>
         <p:spPr>
           <a:xfrm>
-            <a:off x="594360" y="2560320"/>
-            <a:ext cx="11002975" cy="384048"/>
+            <a:off x="640080" y="2418588"/>
+            <a:ext cx="10911535" cy="365760"/>
           </a:xfrm>
           <a:prstGeom prst="rect">
             <a:avLst/>
@@ -3838,7 +3663,7 @@
             <a:r>
               <a:rPr sz="2400" b="0" i="1">
                 <a:solidFill>
-                  <a:srgbClr val="B4B4B4"/>
+                  <a:srgbClr val="AAAAAA"/>
                 </a:solidFill>
                 <a:latin typeface="Arial"/>
               </a:rPr>
@@ -3855,8 +3680,8 @@
         </p:nvSpPr>
         <p:spPr>
           <a:xfrm>
-            <a:off x="594360" y="2980944"/>
-            <a:ext cx="11002975" cy="347472"/>
+            <a:off x="640080" y="2985516"/>
+            <a:ext cx="10911535" cy="731520"/>
           </a:xfrm>
           <a:prstGeom prst="rect">
             <a:avLst/>
@@ -3871,13 +3696,13 @@
           <a:p>
             <a:pPr algn="ctr"/>
             <a:r>
-              <a:rPr sz="2000" b="0" i="1">
-                <a:solidFill>
-                  <a:srgbClr val="8C8C8C"/>
+              <a:rPr sz="4800" b="1" i="0">
+                <a:solidFill>
+                  <a:srgbClr val="FFFFFF"/>
                 </a:solidFill>
                 <a:latin typeface="Arial"/>
               </a:rPr>
-              <a:t/>
+              <a:t>すくーいをーつげる</a:t>
             </a:r>
           </a:p>
         </p:txBody>
@@ -3890,8 +3715,8 @@
         </p:nvSpPr>
         <p:spPr>
           <a:xfrm>
-            <a:off x="594360" y="3529584"/>
-            <a:ext cx="11002975" cy="685800"/>
+            <a:off x="640080" y="3753612"/>
+            <a:ext cx="10911535" cy="365760"/>
           </a:xfrm>
           <a:prstGeom prst="rect">
             <a:avLst/>
@@ -3906,13 +3731,13 @@
           <a:p>
             <a:pPr algn="ctr"/>
             <a:r>
-              <a:rPr sz="4400" b="1" i="0">
-                <a:solidFill>
-                  <a:srgbClr val="FFFFFF"/>
+              <a:rPr sz="2400" b="0" i="1">
+                <a:solidFill>
+                  <a:srgbClr val="AAAAAA"/>
                 </a:solidFill>
                 <a:latin typeface="Arial"/>
               </a:rPr>
-              <a:t>すくーいをーつげる</a:t>
+              <a:t>sukui o tsugeru</a:t>
             </a:r>
           </a:p>
         </p:txBody>
@@ -3925,8 +3750,8 @@
         </p:nvSpPr>
         <p:spPr>
           <a:xfrm>
-            <a:off x="594360" y="4251960"/>
-            <a:ext cx="11002975" cy="384048"/>
+            <a:off x="640080" y="4530852"/>
+            <a:ext cx="10911535" cy="310896"/>
           </a:xfrm>
           <a:prstGeom prst="rect">
             <a:avLst/>
@@ -3941,13 +3766,13 @@
           <a:p>
             <a:pPr algn="ctr"/>
             <a:r>
-              <a:rPr sz="2400" b="0" i="1">
-                <a:solidFill>
-                  <a:srgbClr val="B4B4B4"/>
+              <a:rPr sz="2000" b="0" i="1">
+                <a:solidFill>
+                  <a:srgbClr val="828282"/>
                 </a:solidFill>
                 <a:latin typeface="Arial"/>
               </a:rPr>
-              <a:t>sukui o tsugeru</a:t>
+              <a:t>A Palavra eterna se apresenta</a:t>
             </a:r>
           </a:p>
         </p:txBody>
@@ -3960,8 +3785,8 @@
         </p:nvSpPr>
         <p:spPr>
           <a:xfrm>
-            <a:off x="594360" y="4672584"/>
-            <a:ext cx="11002975" cy="347472"/>
+            <a:off x="640080" y="4896612"/>
+            <a:ext cx="10911535" cy="310896"/>
           </a:xfrm>
           <a:prstGeom prst="rect">
             <a:avLst/>
@@ -3978,11 +3803,11 @@
             <a:r>
               <a:rPr sz="2000" b="0" i="1">
                 <a:solidFill>
-                  <a:srgbClr val="8C8C8C"/>
+                  <a:srgbClr val="828282"/>
                 </a:solidFill>
                 <a:latin typeface="Arial"/>
               </a:rPr>
-              <a:t/>
+              <a:t>Este, este é Cristo, o Rei</a:t>
             </a:r>
           </a:p>
         </p:txBody>
@@ -4021,8 +3846,8 @@
         </p:nvSpPr>
         <p:spPr>
           <a:xfrm>
-            <a:off x="594360" y="1837944"/>
-            <a:ext cx="11002975" cy="685800"/>
+            <a:off x="640080" y="1650492"/>
+            <a:ext cx="10911535" cy="731520"/>
           </a:xfrm>
           <a:prstGeom prst="rect">
             <a:avLst/>
@@ -4037,7 +3862,7 @@
           <a:p>
             <a:pPr algn="ctr"/>
             <a:r>
-              <a:rPr sz="4400" b="1" i="0">
+              <a:rPr sz="4800" b="1" i="0">
                 <a:solidFill>
                   <a:srgbClr val="FFFFFF"/>
                 </a:solidFill>
@@ -4056,8 +3881,8 @@
         </p:nvSpPr>
         <p:spPr>
           <a:xfrm>
-            <a:off x="594360" y="2560320"/>
-            <a:ext cx="11002975" cy="384048"/>
+            <a:off x="640080" y="2418588"/>
+            <a:ext cx="10911535" cy="365760"/>
           </a:xfrm>
           <a:prstGeom prst="rect">
             <a:avLst/>
@@ -4074,7 +3899,7 @@
             <a:r>
               <a:rPr sz="2400" b="0" i="1">
                 <a:solidFill>
-                  <a:srgbClr val="B4B4B4"/>
+                  <a:srgbClr val="AAAAAA"/>
                 </a:solidFill>
                 <a:latin typeface="Arial"/>
               </a:rPr>
@@ -4091,8 +3916,8 @@
         </p:nvSpPr>
         <p:spPr>
           <a:xfrm>
-            <a:off x="594360" y="2980944"/>
-            <a:ext cx="11002975" cy="347472"/>
+            <a:off x="640080" y="2985516"/>
+            <a:ext cx="10911535" cy="731520"/>
           </a:xfrm>
           <a:prstGeom prst="rect">
             <a:avLst/>
@@ -4107,13 +3932,13 @@
           <a:p>
             <a:pPr algn="ctr"/>
             <a:r>
-              <a:rPr sz="2000" b="0" i="1">
-                <a:solidFill>
-                  <a:srgbClr val="8C8C8C"/>
+              <a:rPr sz="4800" b="1" i="0">
+                <a:solidFill>
+                  <a:srgbClr val="FFFFFF"/>
                 </a:solidFill>
                 <a:latin typeface="Arial"/>
               </a:rPr>
-              <a:t/>
+              <a:t>おうなるー キリスト</a:t>
             </a:r>
           </a:p>
         </p:txBody>
@@ -4126,8 +3951,8 @@
         </p:nvSpPr>
         <p:spPr>
           <a:xfrm>
-            <a:off x="594360" y="3529584"/>
-            <a:ext cx="11002975" cy="685800"/>
+            <a:off x="640080" y="3753612"/>
+            <a:ext cx="10911535" cy="365760"/>
           </a:xfrm>
           <a:prstGeom prst="rect">
             <a:avLst/>
@@ -4142,13 +3967,13 @@
           <a:p>
             <a:pPr algn="ctr"/>
             <a:r>
-              <a:rPr sz="4400" b="1" i="0">
-                <a:solidFill>
-                  <a:srgbClr val="FFFFFF"/>
+              <a:rPr sz="2400" b="0" i="1">
+                <a:solidFill>
+                  <a:srgbClr val="AAAAAA"/>
                 </a:solidFill>
                 <a:latin typeface="Arial"/>
               </a:rPr>
-              <a:t>おうなるー キリスト</a:t>
+              <a:t>ou naru kirisuto</a:t>
             </a:r>
           </a:p>
         </p:txBody>
@@ -4161,8 +3986,8 @@
         </p:nvSpPr>
         <p:spPr>
           <a:xfrm>
-            <a:off x="594360" y="4251960"/>
-            <a:ext cx="11002975" cy="384048"/>
+            <a:off x="640080" y="4530852"/>
+            <a:ext cx="10911535" cy="310896"/>
           </a:xfrm>
           <a:prstGeom prst="rect">
             <a:avLst/>
@@ -4177,13 +4002,13 @@
           <a:p>
             <a:pPr algn="ctr"/>
             <a:r>
-              <a:rPr sz="2400" b="0" i="1">
-                <a:solidFill>
-                  <a:srgbClr val="B4B4B4"/>
+              <a:rPr sz="2000" b="0" i="1">
+                <a:solidFill>
+                  <a:srgbClr val="828282"/>
                 </a:solidFill>
                 <a:latin typeface="Arial"/>
               </a:rPr>
-              <a:t>ou naru kirisuto</a:t>
+              <a:t>A quem os pastores guardam e os anjos cantam</a:t>
             </a:r>
           </a:p>
         </p:txBody>
@@ -4196,8 +4021,8 @@
         </p:nvSpPr>
         <p:spPr>
           <a:xfrm>
-            <a:off x="594360" y="4672584"/>
-            <a:ext cx="11002975" cy="347472"/>
+            <a:off x="640080" y="4896612"/>
+            <a:ext cx="10911535" cy="310896"/>
           </a:xfrm>
           <a:prstGeom prst="rect">
             <a:avLst/>
@@ -4214,11 +4039,11 @@
             <a:r>
               <a:rPr sz="2000" b="0" i="1">
                 <a:solidFill>
-                  <a:srgbClr val="8C8C8C"/>
+                  <a:srgbClr val="828282"/>
                 </a:solidFill>
                 <a:latin typeface="Arial"/>
               </a:rPr>
-              <a:t/>
+              <a:t>Apressai-vos, trazei-lhe louvores</a:t>
             </a:r>
           </a:p>
         </p:txBody>
@@ -4257,8 +4082,8 @@
         </p:nvSpPr>
         <p:spPr>
           <a:xfrm>
-            <a:off x="594360" y="1837944"/>
-            <a:ext cx="11002975" cy="685800"/>
+            <a:off x="640080" y="1650492"/>
+            <a:ext cx="10911535" cy="731520"/>
           </a:xfrm>
           <a:prstGeom prst="rect">
             <a:avLst/>
@@ -4273,7 +4098,7 @@
           <a:p>
             <a:pPr algn="ctr"/>
             <a:r>
-              <a:rPr sz="4400" b="1" i="0">
+              <a:rPr sz="4800" b="1" i="0">
                 <a:solidFill>
                   <a:srgbClr val="FFFFFF"/>
                 </a:solidFill>
@@ -4292,8 +4117,8 @@
         </p:nvSpPr>
         <p:spPr>
           <a:xfrm>
-            <a:off x="594360" y="2560320"/>
-            <a:ext cx="11002975" cy="384048"/>
+            <a:off x="640080" y="2418588"/>
+            <a:ext cx="10911535" cy="365760"/>
           </a:xfrm>
           <a:prstGeom prst="rect">
             <a:avLst/>
@@ -4310,7 +4135,7 @@
             <a:r>
               <a:rPr sz="2400" b="0" i="1">
                 <a:solidFill>
-                  <a:srgbClr val="B4B4B4"/>
+                  <a:srgbClr val="AAAAAA"/>
                 </a:solidFill>
                 <a:latin typeface="Arial"/>
               </a:rPr>
@@ -4327,8 +4152,8 @@
         </p:nvSpPr>
         <p:spPr>
           <a:xfrm>
-            <a:off x="594360" y="2980944"/>
-            <a:ext cx="11002975" cy="347472"/>
+            <a:off x="640080" y="2985516"/>
+            <a:ext cx="10911535" cy="731520"/>
           </a:xfrm>
           <a:prstGeom prst="rect">
             <a:avLst/>
@@ -4343,13 +4168,13 @@
           <a:p>
             <a:pPr algn="ctr"/>
             <a:r>
-              <a:rPr sz="2000" b="0" i="1">
-                <a:solidFill>
-                  <a:srgbClr val="8C8C8C"/>
+              <a:rPr sz="4800" b="1" i="0">
+                <a:solidFill>
+                  <a:srgbClr val="FFFFFF"/>
                 </a:solidFill>
                 <a:latin typeface="Arial"/>
               </a:rPr>
-              <a:t/>
+              <a:t>よろーこ びー いわえ</a:t>
             </a:r>
           </a:p>
         </p:txBody>
@@ -4362,8 +4187,8 @@
         </p:nvSpPr>
         <p:spPr>
           <a:xfrm>
-            <a:off x="594360" y="3529584"/>
-            <a:ext cx="11002975" cy="685800"/>
+            <a:off x="640080" y="3753612"/>
+            <a:ext cx="10911535" cy="365760"/>
           </a:xfrm>
           <a:prstGeom prst="rect">
             <a:avLst/>
@@ -4378,13 +4203,13 @@
           <a:p>
             <a:pPr algn="ctr"/>
             <a:r>
-              <a:rPr sz="4400" b="1" i="0">
-                <a:solidFill>
-                  <a:srgbClr val="FFFFFF"/>
+              <a:rPr sz="2400" b="0" i="1">
+                <a:solidFill>
+                  <a:srgbClr val="AAAAAA"/>
                 </a:solidFill>
                 <a:latin typeface="Arial"/>
               </a:rPr>
-              <a:t>よろーこ びー いわえ</a:t>
+              <a:t>torokobi iwae</a:t>
             </a:r>
           </a:p>
         </p:txBody>
@@ -4397,8 +4222,8 @@
         </p:nvSpPr>
         <p:spPr>
           <a:xfrm>
-            <a:off x="594360" y="4251960"/>
-            <a:ext cx="11002975" cy="384048"/>
+            <a:off x="640080" y="4530852"/>
+            <a:ext cx="10911535" cy="310896"/>
           </a:xfrm>
           <a:prstGeom prst="rect">
             <a:avLst/>
@@ -4413,13 +4238,13 @@
           <a:p>
             <a:pPr algn="ctr"/>
             <a:r>
-              <a:rPr sz="2400" b="0" i="1">
-                <a:solidFill>
-                  <a:srgbClr val="B4B4B4"/>
+              <a:rPr sz="2000" b="0" i="1">
+                <a:solidFill>
+                  <a:srgbClr val="828282"/>
                 </a:solidFill>
                 <a:latin typeface="Arial"/>
               </a:rPr>
-              <a:t>torokobi iwae</a:t>
+              <a:t>O Bebê, o Filho de Maria</a:t>
             </a:r>
           </a:p>
         </p:txBody>
@@ -4432,8 +4257,8 @@
         </p:nvSpPr>
         <p:spPr>
           <a:xfrm>
-            <a:off x="594360" y="4672584"/>
-            <a:ext cx="11002975" cy="347472"/>
+            <a:off x="640080" y="4896612"/>
+            <a:ext cx="10911535" cy="310896"/>
           </a:xfrm>
           <a:prstGeom prst="rect">
             <a:avLst/>
@@ -4450,11 +4275,11 @@
             <a:r>
               <a:rPr sz="2000" b="0" i="1">
                 <a:solidFill>
-                  <a:srgbClr val="8C8C8C"/>
+                  <a:srgbClr val="828282"/>
                 </a:solidFill>
                 <a:latin typeface="Arial"/>
               </a:rPr>
-              <a:t/>
+              <a:t>Então trazei ouro, incenso e mirra</a:t>
             </a:r>
           </a:p>
         </p:txBody>
@@ -4493,8 +4318,8 @@
         </p:nvSpPr>
         <p:spPr>
           <a:xfrm>
-            <a:off x="594360" y="2258568"/>
-            <a:ext cx="11002975" cy="685800"/>
+            <a:off x="640080" y="2052828"/>
+            <a:ext cx="10911535" cy="731520"/>
           </a:xfrm>
           <a:prstGeom prst="rect">
             <a:avLst/>
@@ -4509,7 +4334,7 @@
           <a:p>
             <a:pPr algn="ctr"/>
             <a:r>
-              <a:rPr sz="3200" b="1" i="0">
+              <a:rPr sz="3400" b="1" i="0">
                 <a:solidFill>
                   <a:srgbClr val="FFFFFF"/>
                 </a:solidFill>
@@ -4528,8 +4353,8 @@
         </p:nvSpPr>
         <p:spPr>
           <a:xfrm>
-            <a:off x="594360" y="2980944"/>
-            <a:ext cx="11002975" cy="347472"/>
+            <a:off x="640080" y="2985516"/>
+            <a:ext cx="10911535" cy="731520"/>
           </a:xfrm>
           <a:prstGeom prst="rect">
             <a:avLst/>
@@ -4544,83 +4369,13 @@
           <a:p>
             <a:pPr algn="ctr"/>
             <a:r>
-              <a:rPr sz="2200" b="0" i="1">
-                <a:solidFill>
-                  <a:srgbClr val="8C8C8C"/>
-                </a:solidFill>
-                <a:latin typeface="Arial"/>
-              </a:rPr>
-              <a:t/>
-            </a:r>
-          </a:p>
-        </p:txBody>
-      </p:sp>
-      <p:sp>
-        <p:nvSpPr>
-          <p:cNvPr id="4" name="TextBox 3"/>
-          <p:cNvSpPr txBox="1"/>
-          <p:nvPr/>
-        </p:nvSpPr>
-        <p:spPr>
-          <a:xfrm>
-            <a:off x="594360" y="3529584"/>
-            <a:ext cx="11002975" cy="685800"/>
-          </a:xfrm>
-          <a:prstGeom prst="rect">
-            <a:avLst/>
-          </a:prstGeom>
-          <a:noFill/>
-        </p:spPr>
-        <p:txBody>
-          <a:bodyPr wrap="square">
-            <a:spAutoFit/>
-          </a:bodyPr>
-          <a:lstStyle/>
-          <a:p>
-            <a:pPr algn="ctr"/>
-            <a:r>
-              <a:rPr sz="4266" b="1" i="0">
+              <a:rPr sz="4600" b="1" i="0">
                 <a:solidFill>
                   <a:srgbClr val="FFFFFF"/>
                 </a:solidFill>
                 <a:latin typeface="Arial"/>
               </a:rPr>
               <a:t>Apressai-vos, trazei-lhe louvores</a:t>
-            </a:r>
-          </a:p>
-        </p:txBody>
-      </p:sp>
-      <p:sp>
-        <p:nvSpPr>
-          <p:cNvPr id="5" name="TextBox 4"/>
-          <p:cNvSpPr txBox="1"/>
-          <p:nvPr/>
-        </p:nvSpPr>
-        <p:spPr>
-          <a:xfrm>
-            <a:off x="594360" y="4251960"/>
-            <a:ext cx="11002975" cy="347472"/>
-          </a:xfrm>
-          <a:prstGeom prst="rect">
-            <a:avLst/>
-          </a:prstGeom>
-          <a:noFill/>
-        </p:spPr>
-        <p:txBody>
-          <a:bodyPr wrap="square">
-            <a:spAutoFit/>
-          </a:bodyPr>
-          <a:lstStyle/>
-          <a:p>
-            <a:pPr algn="ctr"/>
-            <a:r>
-              <a:rPr sz="2200" b="0" i="1">
-                <a:solidFill>
-                  <a:srgbClr val="8C8C8C"/>
-                </a:solidFill>
-                <a:latin typeface="Arial"/>
-              </a:rPr>
-              <a:t/>
             </a:r>
           </a:p>
         </p:txBody>
@@ -4659,8 +4414,8 @@
         </p:nvSpPr>
         <p:spPr>
           <a:xfrm>
-            <a:off x="594360" y="2258568"/>
-            <a:ext cx="11002975" cy="685800"/>
+            <a:off x="640080" y="2052828"/>
+            <a:ext cx="10911535" cy="731520"/>
           </a:xfrm>
           <a:prstGeom prst="rect">
             <a:avLst/>
@@ -4675,7 +4430,7 @@
           <a:p>
             <a:pPr algn="ctr"/>
             <a:r>
-              <a:rPr sz="4400" b="1" i="0">
+              <a:rPr sz="4800" b="1" i="0">
                 <a:solidFill>
                   <a:srgbClr val="FFFFFF"/>
                 </a:solidFill>
@@ -4694,8 +4449,8 @@
         </p:nvSpPr>
         <p:spPr>
           <a:xfrm>
-            <a:off x="594360" y="2980944"/>
-            <a:ext cx="11002975" cy="347472"/>
+            <a:off x="640080" y="2985516"/>
+            <a:ext cx="10911535" cy="731520"/>
           </a:xfrm>
           <a:prstGeom prst="rect">
             <a:avLst/>
@@ -4710,83 +4465,13 @@
           <a:p>
             <a:pPr algn="ctr"/>
             <a:r>
-              <a:rPr sz="2200" b="0" i="1">
-                <a:solidFill>
-                  <a:srgbClr val="8C8C8C"/>
-                </a:solidFill>
-                <a:latin typeface="Arial"/>
-              </a:rPr>
-              <a:t/>
-            </a:r>
-          </a:p>
-        </p:txBody>
-      </p:sp>
-      <p:sp>
-        <p:nvSpPr>
-          <p:cNvPr id="4" name="TextBox 3"/>
-          <p:cNvSpPr txBox="1"/>
-          <p:nvPr/>
-        </p:nvSpPr>
-        <p:spPr>
-          <a:xfrm>
-            <a:off x="594360" y="3529584"/>
-            <a:ext cx="11002975" cy="685800"/>
-          </a:xfrm>
-          <a:prstGeom prst="rect">
-            <a:avLst/>
-          </a:prstGeom>
-          <a:noFill/>
-        </p:spPr>
-        <p:txBody>
-          <a:bodyPr wrap="square">
-            <a:spAutoFit/>
-          </a:bodyPr>
-          <a:lstStyle/>
-          <a:p>
-            <a:pPr algn="ctr"/>
-            <a:r>
-              <a:rPr sz="3200" b="1" i="0">
+              <a:rPr sz="3400" b="1" i="0">
                 <a:solidFill>
                   <a:srgbClr val="FFFFFF"/>
                 </a:solidFill>
                 <a:latin typeface="Arial"/>
               </a:rPr>
               <a:t>A quem os pastores guardam e os anjos cantam</a:t>
-            </a:r>
-          </a:p>
-        </p:txBody>
-      </p:sp>
-      <p:sp>
-        <p:nvSpPr>
-          <p:cNvPr id="5" name="TextBox 4"/>
-          <p:cNvSpPr txBox="1"/>
-          <p:nvPr/>
-        </p:nvSpPr>
-        <p:spPr>
-          <a:xfrm>
-            <a:off x="594360" y="4251960"/>
-            <a:ext cx="11002975" cy="347472"/>
-          </a:xfrm>
-          <a:prstGeom prst="rect">
-            <a:avLst/>
-          </a:prstGeom>
-          <a:noFill/>
-        </p:spPr>
-        <p:txBody>
-          <a:bodyPr wrap="square">
-            <a:spAutoFit/>
-          </a:bodyPr>
-          <a:lstStyle/>
-          <a:p>
-            <a:pPr algn="ctr"/>
-            <a:r>
-              <a:rPr sz="2200" b="0" i="1">
-                <a:solidFill>
-                  <a:srgbClr val="8C8C8C"/>
-                </a:solidFill>
-                <a:latin typeface="Arial"/>
-              </a:rPr>
-              <a:t/>
             </a:r>
           </a:p>
         </p:txBody>
@@ -4825,8 +4510,8 @@
         </p:nvSpPr>
         <p:spPr>
           <a:xfrm>
-            <a:off x="594360" y="2258568"/>
-            <a:ext cx="11002975" cy="685800"/>
+            <a:off x="640080" y="2052828"/>
+            <a:ext cx="10911535" cy="731520"/>
           </a:xfrm>
           <a:prstGeom prst="rect">
             <a:avLst/>
@@ -4841,7 +4526,7 @@
           <a:p>
             <a:pPr algn="ctr"/>
             <a:r>
-              <a:rPr sz="4266" b="1" i="0">
+              <a:rPr sz="4600" b="1" i="0">
                 <a:solidFill>
                   <a:srgbClr val="FFFFFF"/>
                 </a:solidFill>
@@ -4860,8 +4545,8 @@
         </p:nvSpPr>
         <p:spPr>
           <a:xfrm>
-            <a:off x="594360" y="2980944"/>
-            <a:ext cx="11002975" cy="347472"/>
+            <a:off x="640080" y="2985516"/>
+            <a:ext cx="10911535" cy="731520"/>
           </a:xfrm>
           <a:prstGeom prst="rect">
             <a:avLst/>
@@ -4876,83 +4561,13 @@
           <a:p>
             <a:pPr algn="ctr"/>
             <a:r>
-              <a:rPr sz="2200" b="0" i="1">
-                <a:solidFill>
-                  <a:srgbClr val="8C8C8C"/>
-                </a:solidFill>
-                <a:latin typeface="Arial"/>
-              </a:rPr>
-              <a:t/>
-            </a:r>
-          </a:p>
-        </p:txBody>
-      </p:sp>
-      <p:sp>
-        <p:nvSpPr>
-          <p:cNvPr id="4" name="TextBox 3"/>
-          <p:cNvSpPr txBox="1"/>
-          <p:nvPr/>
-        </p:nvSpPr>
-        <p:spPr>
-          <a:xfrm>
-            <a:off x="594360" y="3529584"/>
-            <a:ext cx="11002975" cy="685800"/>
-          </a:xfrm>
-          <a:prstGeom prst="rect">
-            <a:avLst/>
-          </a:prstGeom>
-          <a:noFill/>
-        </p:spPr>
-        <p:txBody>
-          <a:bodyPr wrap="square">
-            <a:spAutoFit/>
-          </a:bodyPr>
-          <a:lstStyle/>
-          <a:p>
-            <a:pPr algn="ctr"/>
-            <a:r>
-              <a:rPr sz="4400" b="1" i="0">
+              <a:rPr sz="4800" b="1" i="0">
                 <a:solidFill>
                   <a:srgbClr val="FFFFFF"/>
                 </a:solidFill>
                 <a:latin typeface="Arial"/>
               </a:rPr>
               <a:t>O Bebê, o Filho de Maria</a:t>
-            </a:r>
-          </a:p>
-        </p:txBody>
-      </p:sp>
-      <p:sp>
-        <p:nvSpPr>
-          <p:cNvPr id="5" name="TextBox 4"/>
-          <p:cNvSpPr txBox="1"/>
-          <p:nvPr/>
-        </p:nvSpPr>
-        <p:spPr>
-          <a:xfrm>
-            <a:off x="594360" y="4251960"/>
-            <a:ext cx="11002975" cy="347472"/>
-          </a:xfrm>
-          <a:prstGeom prst="rect">
-            <a:avLst/>
-          </a:prstGeom>
-          <a:noFill/>
-        </p:spPr>
-        <p:txBody>
-          <a:bodyPr wrap="square">
-            <a:spAutoFit/>
-          </a:bodyPr>
-          <a:lstStyle/>
-          <a:p>
-            <a:pPr algn="ctr"/>
-            <a:r>
-              <a:rPr sz="2200" b="0" i="1">
-                <a:solidFill>
-                  <a:srgbClr val="8C8C8C"/>
-                </a:solidFill>
-                <a:latin typeface="Arial"/>
-              </a:rPr>
-              <a:t/>
             </a:r>
           </a:p>
         </p:txBody>
@@ -4991,8 +4606,8 @@
         </p:nvSpPr>
         <p:spPr>
           <a:xfrm>
-            <a:off x="594360" y="2258568"/>
-            <a:ext cx="11002975" cy="685800"/>
+            <a:off x="640080" y="2052828"/>
+            <a:ext cx="10911535" cy="731520"/>
           </a:xfrm>
           <a:prstGeom prst="rect">
             <a:avLst/>
@@ -5007,7 +4622,7 @@
           <a:p>
             <a:pPr algn="ctr"/>
             <a:r>
-              <a:rPr sz="4400" b="1" i="0">
+              <a:rPr sz="4800" b="1" i="0">
                 <a:solidFill>
                   <a:srgbClr val="FFFFFF"/>
                 </a:solidFill>
@@ -5026,8 +4641,8 @@
         </p:nvSpPr>
         <p:spPr>
           <a:xfrm>
-            <a:off x="594360" y="2980944"/>
-            <a:ext cx="11002975" cy="347472"/>
+            <a:off x="640080" y="2985516"/>
+            <a:ext cx="10911535" cy="731520"/>
           </a:xfrm>
           <a:prstGeom prst="rect">
             <a:avLst/>
@@ -5042,83 +4657,13 @@
           <a:p>
             <a:pPr algn="ctr"/>
             <a:r>
-              <a:rPr sz="2200" b="0" i="1">
-                <a:solidFill>
-                  <a:srgbClr val="8C8C8C"/>
-                </a:solidFill>
-                <a:latin typeface="Arial"/>
-              </a:rPr>
-              <a:t/>
-            </a:r>
-          </a:p>
-        </p:txBody>
-      </p:sp>
-      <p:sp>
-        <p:nvSpPr>
-          <p:cNvPr id="4" name="TextBox 3"/>
-          <p:cNvSpPr txBox="1"/>
-          <p:nvPr/>
-        </p:nvSpPr>
-        <p:spPr>
-          <a:xfrm>
-            <a:off x="594360" y="3529584"/>
-            <a:ext cx="11002975" cy="685800"/>
-          </a:xfrm>
-          <a:prstGeom prst="rect">
-            <a:avLst/>
-          </a:prstGeom>
-          <a:noFill/>
-        </p:spPr>
-        <p:txBody>
-          <a:bodyPr wrap="square">
-            <a:spAutoFit/>
-          </a:bodyPr>
-          <a:lstStyle/>
-          <a:p>
-            <a:pPr algn="ctr"/>
-            <a:r>
-              <a:rPr sz="3705" b="1" i="0">
+              <a:rPr sz="4000" b="1" i="0">
                 <a:solidFill>
                   <a:srgbClr val="FFFFFF"/>
                 </a:solidFill>
                 <a:latin typeface="Arial"/>
               </a:rPr>
               <a:t>A quem os anjos saúdam com hinos doces</a:t>
-            </a:r>
-          </a:p>
-        </p:txBody>
-      </p:sp>
-      <p:sp>
-        <p:nvSpPr>
-          <p:cNvPr id="5" name="TextBox 4"/>
-          <p:cNvSpPr txBox="1"/>
-          <p:nvPr/>
-        </p:nvSpPr>
-        <p:spPr>
-          <a:xfrm>
-            <a:off x="594360" y="4251960"/>
-            <a:ext cx="11002975" cy="347472"/>
-          </a:xfrm>
-          <a:prstGeom prst="rect">
-            <a:avLst/>
-          </a:prstGeom>
-          <a:noFill/>
-        </p:spPr>
-        <p:txBody>
-          <a:bodyPr wrap="square">
-            <a:spAutoFit/>
-          </a:bodyPr>
-          <a:lstStyle/>
-          <a:p>
-            <a:pPr algn="ctr"/>
-            <a:r>
-              <a:rPr sz="2200" b="0" i="1">
-                <a:solidFill>
-                  <a:srgbClr val="8C8C8C"/>
-                </a:solidFill>
-                <a:latin typeface="Arial"/>
-              </a:rPr>
-              <a:t/>
             </a:r>
           </a:p>
         </p:txBody>
@@ -5157,8 +4702,8 @@
         </p:nvSpPr>
         <p:spPr>
           <a:xfrm>
-            <a:off x="594360" y="2258568"/>
-            <a:ext cx="11002975" cy="685800"/>
+            <a:off x="640080" y="2052828"/>
+            <a:ext cx="10911535" cy="731520"/>
           </a:xfrm>
           <a:prstGeom prst="rect">
             <a:avLst/>
@@ -5173,7 +4718,7 @@
           <a:p>
             <a:pPr algn="ctr"/>
             <a:r>
-              <a:rPr sz="4400" b="1" i="0">
+              <a:rPr sz="4800" b="1" i="0">
                 <a:solidFill>
                   <a:srgbClr val="FFFFFF"/>
                 </a:solidFill>
@@ -5192,8 +4737,8 @@
         </p:nvSpPr>
         <p:spPr>
           <a:xfrm>
-            <a:off x="594360" y="2980944"/>
-            <a:ext cx="11002975" cy="347472"/>
+            <a:off x="640080" y="2985516"/>
+            <a:ext cx="10911535" cy="731520"/>
           </a:xfrm>
           <a:prstGeom prst="rect">
             <a:avLst/>
@@ -5208,83 +4753,13 @@
           <a:p>
             <a:pPr algn="ctr"/>
             <a:r>
-              <a:rPr sz="2200" b="0" i="1">
-                <a:solidFill>
-                  <a:srgbClr val="8C8C8C"/>
-                </a:solidFill>
-                <a:latin typeface="Arial"/>
-              </a:rPr>
-              <a:t/>
-            </a:r>
-          </a:p>
-        </p:txBody>
-      </p:sp>
-      <p:sp>
-        <p:nvSpPr>
-          <p:cNvPr id="4" name="TextBox 3"/>
-          <p:cNvSpPr txBox="1"/>
-          <p:nvPr/>
-        </p:nvSpPr>
-        <p:spPr>
-          <a:xfrm>
-            <a:off x="594360" y="3529584"/>
-            <a:ext cx="11002975" cy="685800"/>
-          </a:xfrm>
-          <a:prstGeom prst="rect">
-            <a:avLst/>
-          </a:prstGeom>
-          <a:noFill/>
-        </p:spPr>
-        <p:txBody>
-          <a:bodyPr wrap="square">
-            <a:spAutoFit/>
-          </a:bodyPr>
-          <a:lstStyle/>
-          <a:p>
-            <a:pPr algn="ctr"/>
-            <a:r>
-              <a:rPr sz="4400" b="1" i="0">
+              <a:rPr sz="4800" b="1" i="0">
                 <a:solidFill>
                   <a:srgbClr val="FFFFFF"/>
                 </a:solidFill>
                 <a:latin typeface="Arial"/>
               </a:rPr>
               <a:t>Este, este é Cristo, o Rei</a:t>
-            </a:r>
-          </a:p>
-        </p:txBody>
-      </p:sp>
-      <p:sp>
-        <p:nvSpPr>
-          <p:cNvPr id="5" name="TextBox 4"/>
-          <p:cNvSpPr txBox="1"/>
-          <p:nvPr/>
-        </p:nvSpPr>
-        <p:spPr>
-          <a:xfrm>
-            <a:off x="594360" y="4251960"/>
-            <a:ext cx="11002975" cy="347472"/>
-          </a:xfrm>
-          <a:prstGeom prst="rect">
-            <a:avLst/>
-          </a:prstGeom>
-          <a:noFill/>
-        </p:spPr>
-        <p:txBody>
-          <a:bodyPr wrap="square">
-            <a:spAutoFit/>
-          </a:bodyPr>
-          <a:lstStyle/>
-          <a:p>
-            <a:pPr algn="ctr"/>
-            <a:r>
-              <a:rPr sz="2200" b="0" i="1">
-                <a:solidFill>
-                  <a:srgbClr val="8C8C8C"/>
-                </a:solidFill>
-                <a:latin typeface="Arial"/>
-              </a:rPr>
-              <a:t/>
             </a:r>
           </a:p>
         </p:txBody>
@@ -5323,8 +4798,8 @@
         </p:nvSpPr>
         <p:spPr>
           <a:xfrm>
-            <a:off x="594360" y="2258568"/>
-            <a:ext cx="11002975" cy="685800"/>
+            <a:off x="640080" y="2052828"/>
+            <a:ext cx="10911535" cy="731520"/>
           </a:xfrm>
           <a:prstGeom prst="rect">
             <a:avLst/>
@@ -5339,7 +4814,7 @@
           <a:p>
             <a:pPr algn="ctr"/>
             <a:r>
-              <a:rPr sz="3200" b="1" i="0">
+              <a:rPr sz="3400" b="1" i="0">
                 <a:solidFill>
                   <a:srgbClr val="FFFFFF"/>
                 </a:solidFill>
@@ -5358,8 +4833,8 @@
         </p:nvSpPr>
         <p:spPr>
           <a:xfrm>
-            <a:off x="594360" y="2980944"/>
-            <a:ext cx="11002975" cy="347472"/>
+            <a:off x="640080" y="2985516"/>
+            <a:ext cx="10911535" cy="731520"/>
           </a:xfrm>
           <a:prstGeom prst="rect">
             <a:avLst/>
@@ -5374,83 +4849,13 @@
           <a:p>
             <a:pPr algn="ctr"/>
             <a:r>
-              <a:rPr sz="2200" b="0" i="1">
-                <a:solidFill>
-                  <a:srgbClr val="8C8C8C"/>
-                </a:solidFill>
-                <a:latin typeface="Arial"/>
-              </a:rPr>
-              <a:t/>
-            </a:r>
-          </a:p>
-        </p:txBody>
-      </p:sp>
-      <p:sp>
-        <p:nvSpPr>
-          <p:cNvPr id="4" name="TextBox 3"/>
-          <p:cNvSpPr txBox="1"/>
-          <p:nvPr/>
-        </p:nvSpPr>
-        <p:spPr>
-          <a:xfrm>
-            <a:off x="594360" y="3529584"/>
-            <a:ext cx="11002975" cy="685800"/>
-          </a:xfrm>
-          <a:prstGeom prst="rect">
-            <a:avLst/>
-          </a:prstGeom>
-          <a:noFill/>
-        </p:spPr>
-        <p:txBody>
-          <a:bodyPr wrap="square">
-            <a:spAutoFit/>
-          </a:bodyPr>
-          <a:lstStyle/>
-          <a:p>
-            <a:pPr algn="ctr"/>
-            <a:r>
-              <a:rPr sz="4266" b="1" i="0">
+              <a:rPr sz="4600" b="1" i="0">
                 <a:solidFill>
                   <a:srgbClr val="FFFFFF"/>
                 </a:solidFill>
                 <a:latin typeface="Arial"/>
               </a:rPr>
               <a:t>Apressai-vos, trazei-lhe louvores</a:t>
-            </a:r>
-          </a:p>
-        </p:txBody>
-      </p:sp>
-      <p:sp>
-        <p:nvSpPr>
-          <p:cNvPr id="5" name="TextBox 4"/>
-          <p:cNvSpPr txBox="1"/>
-          <p:nvPr/>
-        </p:nvSpPr>
-        <p:spPr>
-          <a:xfrm>
-            <a:off x="594360" y="4251960"/>
-            <a:ext cx="11002975" cy="347472"/>
-          </a:xfrm>
-          <a:prstGeom prst="rect">
-            <a:avLst/>
-          </a:prstGeom>
-          <a:noFill/>
-        </p:spPr>
-        <p:txBody>
-          <a:bodyPr wrap="square">
-            <a:spAutoFit/>
-          </a:bodyPr>
-          <a:lstStyle/>
-          <a:p>
-            <a:pPr algn="ctr"/>
-            <a:r>
-              <a:rPr sz="2200" b="0" i="1">
-                <a:solidFill>
-                  <a:srgbClr val="8C8C8C"/>
-                </a:solidFill>
-                <a:latin typeface="Arial"/>
-              </a:rPr>
-              <a:t/>
             </a:r>
           </a:p>
         </p:txBody>
@@ -5489,8 +4894,8 @@
         </p:nvSpPr>
         <p:spPr>
           <a:xfrm>
-            <a:off x="594360" y="2258568"/>
-            <a:ext cx="11002975" cy="685800"/>
+            <a:off x="640080" y="2052828"/>
+            <a:ext cx="10911535" cy="731520"/>
           </a:xfrm>
           <a:prstGeom prst="rect">
             <a:avLst/>
@@ -5505,7 +4910,7 @@
           <a:p>
             <a:pPr algn="ctr"/>
             <a:r>
-              <a:rPr sz="4400" b="1" i="0">
+              <a:rPr sz="4800" b="1" i="0">
                 <a:solidFill>
                   <a:srgbClr val="FFFFFF"/>
                 </a:solidFill>
@@ -5524,8 +4929,8 @@
         </p:nvSpPr>
         <p:spPr>
           <a:xfrm>
-            <a:off x="594360" y="2980944"/>
-            <a:ext cx="11002975" cy="347472"/>
+            <a:off x="640080" y="2985516"/>
+            <a:ext cx="10911535" cy="731520"/>
           </a:xfrm>
           <a:prstGeom prst="rect">
             <a:avLst/>
@@ -5540,83 +4945,13 @@
           <a:p>
             <a:pPr algn="ctr"/>
             <a:r>
-              <a:rPr sz="2200" b="0" i="1">
-                <a:solidFill>
-                  <a:srgbClr val="8C8C8C"/>
-                </a:solidFill>
-                <a:latin typeface="Arial"/>
-              </a:rPr>
-              <a:t/>
-            </a:r>
-          </a:p>
-        </p:txBody>
-      </p:sp>
-      <p:sp>
-        <p:nvSpPr>
-          <p:cNvPr id="4" name="TextBox 3"/>
-          <p:cNvSpPr txBox="1"/>
-          <p:nvPr/>
-        </p:nvSpPr>
-        <p:spPr>
-          <a:xfrm>
-            <a:off x="594360" y="3529584"/>
-            <a:ext cx="11002975" cy="685800"/>
-          </a:xfrm>
-          <a:prstGeom prst="rect">
-            <a:avLst/>
-          </a:prstGeom>
-          <a:noFill/>
-        </p:spPr>
-        <p:txBody>
-          <a:bodyPr wrap="square">
-            <a:spAutoFit/>
-          </a:bodyPr>
-          <a:lstStyle/>
-          <a:p>
-            <a:pPr algn="ctr"/>
-            <a:r>
-              <a:rPr sz="4400" b="1" i="0">
+              <a:rPr sz="4800" b="1" i="0">
                 <a:solidFill>
                   <a:srgbClr val="FFFFFF"/>
                 </a:solidFill>
                 <a:latin typeface="Arial"/>
               </a:rPr>
               <a:t>Por que jaz em tão humilde lugar</a:t>
-            </a:r>
-          </a:p>
-        </p:txBody>
-      </p:sp>
-      <p:sp>
-        <p:nvSpPr>
-          <p:cNvPr id="5" name="TextBox 4"/>
-          <p:cNvSpPr txBox="1"/>
-          <p:nvPr/>
-        </p:nvSpPr>
-        <p:spPr>
-          <a:xfrm>
-            <a:off x="594360" y="4251960"/>
-            <a:ext cx="11002975" cy="347472"/>
-          </a:xfrm>
-          <a:prstGeom prst="rect">
-            <a:avLst/>
-          </a:prstGeom>
-          <a:noFill/>
-        </p:spPr>
-        <p:txBody>
-          <a:bodyPr wrap="square">
-            <a:spAutoFit/>
-          </a:bodyPr>
-          <a:lstStyle/>
-          <a:p>
-            <a:pPr algn="ctr"/>
-            <a:r>
-              <a:rPr sz="2200" b="0" i="1">
-                <a:solidFill>
-                  <a:srgbClr val="8C8C8C"/>
-                </a:solidFill>
-                <a:latin typeface="Arial"/>
-              </a:rPr>
-              <a:t/>
             </a:r>
           </a:p>
         </p:txBody>
@@ -5655,8 +4990,8 @@
         </p:nvSpPr>
         <p:spPr>
           <a:xfrm>
-            <a:off x="594360" y="2258568"/>
-            <a:ext cx="11002975" cy="685800"/>
+            <a:off x="640080" y="2052828"/>
+            <a:ext cx="10911535" cy="731520"/>
           </a:xfrm>
           <a:prstGeom prst="rect">
             <a:avLst/>
@@ -5671,7 +5006,7 @@
           <a:p>
             <a:pPr algn="ctr"/>
             <a:r>
-              <a:rPr sz="4400" b="1" i="0">
+              <a:rPr sz="4800" b="1" i="0">
                 <a:solidFill>
                   <a:srgbClr val="FFFFFF"/>
                 </a:solidFill>
@@ -5690,8 +5025,8 @@
         </p:nvSpPr>
         <p:spPr>
           <a:xfrm>
-            <a:off x="594360" y="2980944"/>
-            <a:ext cx="11002975" cy="347472"/>
+            <a:off x="640080" y="2985516"/>
+            <a:ext cx="10911535" cy="731520"/>
           </a:xfrm>
           <a:prstGeom prst="rect">
             <a:avLst/>
@@ -5706,13 +5041,13 @@
           <a:p>
             <a:pPr algn="ctr"/>
             <a:r>
-              <a:rPr sz="2200" b="0" i="1">
-                <a:solidFill>
-                  <a:srgbClr val="8C8C8C"/>
+              <a:rPr sz="4200" b="1" i="0">
+                <a:solidFill>
+                  <a:srgbClr val="FFFFFF"/>
                 </a:solidFill>
                 <a:latin typeface="Arial"/>
               </a:rPr>
-              <a:t/>
+              <a:t>Bondoso cristão, pelos pecadores vem</a:t>
             </a:r>
           </a:p>
         </p:txBody>
@@ -5725,8 +5060,8 @@
         </p:nvSpPr>
         <p:spPr>
           <a:xfrm>
-            <a:off x="594360" y="3529584"/>
-            <a:ext cx="11002975" cy="685800"/>
+            <a:off x="640080" y="4128516"/>
+            <a:ext cx="10911535" cy="310896"/>
           </a:xfrm>
           <a:prstGeom prst="rect">
             <a:avLst/>
@@ -5741,13 +5076,13 @@
           <a:p>
             <a:pPr algn="ctr"/>
             <a:r>
-              <a:rPr sz="3911" b="1" i="0">
-                <a:solidFill>
-                  <a:srgbClr val="FFFFFF"/>
+              <a:rPr sz="2000" b="0" i="0">
+                <a:solidFill>
+                  <a:srgbClr val="828282"/>
                 </a:solidFill>
                 <a:latin typeface="Arial"/>
               </a:rPr>
-              <a:t>Bondoso cristão, pelos pecadores vem</a:t>
+              <a:t>生まれたーみどりごー</a:t>
             </a:r>
           </a:p>
         </p:txBody>
@@ -5760,8 +5095,8 @@
         </p:nvSpPr>
         <p:spPr>
           <a:xfrm>
-            <a:off x="594360" y="4251960"/>
-            <a:ext cx="11002975" cy="347472"/>
+            <a:off x="640080" y="4494276"/>
+            <a:ext cx="10911535" cy="310896"/>
           </a:xfrm>
           <a:prstGeom prst="rect">
             <a:avLst/>
@@ -5776,13 +5111,13 @@
           <a:p>
             <a:pPr algn="ctr"/>
             <a:r>
-              <a:rPr sz="2200" b="0" i="1">
-                <a:solidFill>
-                  <a:srgbClr val="8C8C8C"/>
+              <a:rPr sz="2000" b="0" i="0">
+                <a:solidFill>
+                  <a:srgbClr val="828282"/>
                 </a:solidFill>
                 <a:latin typeface="Arial"/>
               </a:rPr>
-              <a:t/>
+              <a:t>ねむるかーいばおけ</a:t>
             </a:r>
           </a:p>
         </p:txBody>
@@ -5821,8 +5156,8 @@
         </p:nvSpPr>
         <p:spPr>
           <a:xfrm>
-            <a:off x="594360" y="2258568"/>
-            <a:ext cx="11002975" cy="685800"/>
+            <a:off x="640080" y="2052828"/>
+            <a:ext cx="10911535" cy="731520"/>
           </a:xfrm>
           <a:prstGeom prst="rect">
             <a:avLst/>
@@ -5837,7 +5172,7 @@
           <a:p>
             <a:pPr algn="ctr"/>
             <a:r>
-              <a:rPr sz="4400" b="1" i="0">
+              <a:rPr sz="4800" b="1" i="0">
                 <a:solidFill>
                   <a:srgbClr val="FFFFFF"/>
                 </a:solidFill>
@@ -5856,8 +5191,8 @@
         </p:nvSpPr>
         <p:spPr>
           <a:xfrm>
-            <a:off x="594360" y="2980944"/>
-            <a:ext cx="11002975" cy="347472"/>
+            <a:off x="640080" y="2985516"/>
+            <a:ext cx="10911535" cy="731520"/>
           </a:xfrm>
           <a:prstGeom prst="rect">
             <a:avLst/>
@@ -5872,13 +5207,13 @@
           <a:p>
             <a:pPr algn="ctr"/>
             <a:r>
-              <a:rPr sz="2200" b="0" i="1">
-                <a:solidFill>
-                  <a:srgbClr val="8C8C8C"/>
+              <a:rPr sz="4800" b="1" i="0">
+                <a:solidFill>
+                  <a:srgbClr val="FFFFFF"/>
                 </a:solidFill>
                 <a:latin typeface="Arial"/>
               </a:rPr>
-              <a:t/>
+              <a:t>Este, este é Cristo, o Rei</a:t>
             </a:r>
           </a:p>
         </p:txBody>
@@ -5891,8 +5226,8 @@
         </p:nvSpPr>
         <p:spPr>
           <a:xfrm>
-            <a:off x="594360" y="3529584"/>
-            <a:ext cx="11002975" cy="685800"/>
+            <a:off x="640080" y="4128516"/>
+            <a:ext cx="10911535" cy="310896"/>
           </a:xfrm>
           <a:prstGeom prst="rect">
             <a:avLst/>
@@ -5907,13 +5242,13 @@
           <a:p>
             <a:pPr algn="ctr"/>
             <a:r>
-              <a:rPr sz="4400" b="1" i="0">
-                <a:solidFill>
-                  <a:srgbClr val="FFFFFF"/>
+              <a:rPr sz="2000" b="0" i="0">
+                <a:solidFill>
+                  <a:srgbClr val="828282"/>
                 </a:solidFill>
                 <a:latin typeface="Arial"/>
               </a:rPr>
-              <a:t>Este, este é Cristo, o Rei</a:t>
+              <a:t>まずしきーものらにー</a:t>
             </a:r>
           </a:p>
         </p:txBody>
@@ -5926,8 +5261,8 @@
         </p:nvSpPr>
         <p:spPr>
           <a:xfrm>
-            <a:off x="594360" y="4251960"/>
-            <a:ext cx="11002975" cy="347472"/>
+            <a:off x="640080" y="4494276"/>
+            <a:ext cx="10911535" cy="310896"/>
           </a:xfrm>
           <a:prstGeom prst="rect">
             <a:avLst/>
@@ -5942,13 +5277,13 @@
           <a:p>
             <a:pPr algn="ctr"/>
             <a:r>
-              <a:rPr sz="2200" b="0" i="1">
-                <a:solidFill>
-                  <a:srgbClr val="8C8C8C"/>
+              <a:rPr sz="2000" b="0" i="0">
+                <a:solidFill>
+                  <a:srgbClr val="828282"/>
                 </a:solidFill>
                 <a:latin typeface="Arial"/>
               </a:rPr>
-              <a:t/>
+              <a:t>すくーいをーつげる</a:t>
             </a:r>
           </a:p>
         </p:txBody>
@@ -5987,8 +5322,8 @@
         </p:nvSpPr>
         <p:spPr>
           <a:xfrm>
-            <a:off x="594360" y="2258568"/>
-            <a:ext cx="11002975" cy="685800"/>
+            <a:off x="640080" y="2052828"/>
+            <a:ext cx="10911535" cy="731520"/>
           </a:xfrm>
           <a:prstGeom prst="rect">
             <a:avLst/>
@@ -6003,7 +5338,7 @@
           <a:p>
             <a:pPr algn="ctr"/>
             <a:r>
-              <a:rPr sz="3200" b="1" i="0">
+              <a:rPr sz="3400" b="1" i="0">
                 <a:solidFill>
                   <a:srgbClr val="FFFFFF"/>
                 </a:solidFill>
@@ -6022,8 +5357,8 @@
         </p:nvSpPr>
         <p:spPr>
           <a:xfrm>
-            <a:off x="594360" y="2980944"/>
-            <a:ext cx="11002975" cy="347472"/>
+            <a:off x="640080" y="2985516"/>
+            <a:ext cx="10911535" cy="731520"/>
           </a:xfrm>
           <a:prstGeom prst="rect">
             <a:avLst/>
@@ -6038,13 +5373,13 @@
           <a:p>
             <a:pPr algn="ctr"/>
             <a:r>
-              <a:rPr sz="2200" b="0" i="1">
-                <a:solidFill>
-                  <a:srgbClr val="8C8C8C"/>
+              <a:rPr sz="4600" b="1" i="0">
+                <a:solidFill>
+                  <a:srgbClr val="FFFFFF"/>
                 </a:solidFill>
                 <a:latin typeface="Arial"/>
               </a:rPr>
-              <a:t/>
+              <a:t>Apressai-vos, trazei-lhe louvores</a:t>
             </a:r>
           </a:p>
         </p:txBody>
@@ -6057,8 +5392,8 @@
         </p:nvSpPr>
         <p:spPr>
           <a:xfrm>
-            <a:off x="594360" y="3529584"/>
-            <a:ext cx="11002975" cy="685800"/>
+            <a:off x="640080" y="4128516"/>
+            <a:ext cx="10911535" cy="310896"/>
           </a:xfrm>
           <a:prstGeom prst="rect">
             <a:avLst/>
@@ -6073,13 +5408,13 @@
           <a:p>
             <a:pPr algn="ctr"/>
             <a:r>
-              <a:rPr sz="4266" b="1" i="0">
-                <a:solidFill>
-                  <a:srgbClr val="FFFFFF"/>
+              <a:rPr sz="2000" b="0" i="0">
+                <a:solidFill>
+                  <a:srgbClr val="828282"/>
                 </a:solidFill>
                 <a:latin typeface="Arial"/>
               </a:rPr>
-              <a:t>Apressai-vos, trazei-lhe louvores</a:t>
+              <a:t>いまーむ かえるー</a:t>
             </a:r>
           </a:p>
         </p:txBody>
@@ -6092,8 +5427,8 @@
         </p:nvSpPr>
         <p:spPr>
           <a:xfrm>
-            <a:off x="594360" y="4251960"/>
-            <a:ext cx="11002975" cy="347472"/>
+            <a:off x="640080" y="4494276"/>
+            <a:ext cx="10911535" cy="310896"/>
           </a:xfrm>
           <a:prstGeom prst="rect">
             <a:avLst/>
@@ -6108,13 +5443,13 @@
           <a:p>
             <a:pPr algn="ctr"/>
             <a:r>
-              <a:rPr sz="2200" b="0" i="1">
-                <a:solidFill>
-                  <a:srgbClr val="8C8C8C"/>
+              <a:rPr sz="2000" b="0" i="0">
+                <a:solidFill>
+                  <a:srgbClr val="828282"/>
                 </a:solidFill>
                 <a:latin typeface="Arial"/>
               </a:rPr>
-              <a:t/>
+              <a:t>おうなるー キリスト</a:t>
             </a:r>
           </a:p>
         </p:txBody>
@@ -6153,8 +5488,8 @@
         </p:nvSpPr>
         <p:spPr>
           <a:xfrm>
-            <a:off x="594360" y="2258568"/>
-            <a:ext cx="11002975" cy="685800"/>
+            <a:off x="640080" y="2052828"/>
+            <a:ext cx="10911535" cy="731520"/>
           </a:xfrm>
           <a:prstGeom prst="rect">
             <a:avLst/>
@@ -6169,7 +5504,7 @@
           <a:p>
             <a:pPr algn="ctr"/>
             <a:r>
-              <a:rPr sz="4400" b="1" i="0">
+              <a:rPr sz="4800" b="1" i="0">
                 <a:solidFill>
                   <a:srgbClr val="FFFFFF"/>
                 </a:solidFill>
@@ -6188,8 +5523,8 @@
         </p:nvSpPr>
         <p:spPr>
           <a:xfrm>
-            <a:off x="594360" y="2980944"/>
-            <a:ext cx="11002975" cy="347472"/>
+            <a:off x="640080" y="2985516"/>
+            <a:ext cx="10911535" cy="731520"/>
           </a:xfrm>
           <a:prstGeom prst="rect">
             <a:avLst/>
@@ -6204,13 +5539,13 @@
           <a:p>
             <a:pPr algn="ctr"/>
             <a:r>
-              <a:rPr sz="2200" b="0" i="1">
-                <a:solidFill>
-                  <a:srgbClr val="8C8C8C"/>
+              <a:rPr sz="4500" b="1" i="0">
+                <a:solidFill>
+                  <a:srgbClr val="FFFFFF"/>
                 </a:solidFill>
                 <a:latin typeface="Arial"/>
               </a:rPr>
-              <a:t/>
+              <a:t>Então trazei ouro, incenso e mirra</a:t>
             </a:r>
           </a:p>
         </p:txBody>
@@ -6223,8 +5558,8 @@
         </p:nvSpPr>
         <p:spPr>
           <a:xfrm>
-            <a:off x="594360" y="3529584"/>
-            <a:ext cx="11002975" cy="685800"/>
+            <a:off x="640080" y="4128516"/>
+            <a:ext cx="10911535" cy="310896"/>
           </a:xfrm>
           <a:prstGeom prst="rect">
             <a:avLst/>
@@ -6239,13 +5574,13 @@
           <a:p>
             <a:pPr algn="ctr"/>
             <a:r>
-              <a:rPr sz="4141" b="1" i="0">
-                <a:solidFill>
-                  <a:srgbClr val="FFFFFF"/>
+              <a:rPr sz="2000" b="0" i="0">
+                <a:solidFill>
+                  <a:srgbClr val="828282"/>
                 </a:solidFill>
                 <a:latin typeface="Arial"/>
               </a:rPr>
-              <a:t>Então trazei ouro, incenso e mirra</a:t>
+              <a:t>ともーに つどいー</a:t>
             </a:r>
           </a:p>
         </p:txBody>
@@ -6258,8 +5593,8 @@
         </p:nvSpPr>
         <p:spPr>
           <a:xfrm>
-            <a:off x="594360" y="4251960"/>
-            <a:ext cx="11002975" cy="347472"/>
+            <a:off x="640080" y="4494276"/>
+            <a:ext cx="10911535" cy="310896"/>
           </a:xfrm>
           <a:prstGeom prst="rect">
             <a:avLst/>
@@ -6274,13 +5609,13 @@
           <a:p>
             <a:pPr algn="ctr"/>
             <a:r>
-              <a:rPr sz="2200" b="0" i="1">
-                <a:solidFill>
-                  <a:srgbClr val="8C8C8C"/>
+              <a:rPr sz="2000" b="0" i="0">
+                <a:solidFill>
+                  <a:srgbClr val="828282"/>
                 </a:solidFill>
                 <a:latin typeface="Arial"/>
               </a:rPr>
-              <a:t/>
+              <a:t>よろーこ びー いわえ</a:t>
             </a:r>
           </a:p>
         </p:txBody>

--- a/output_pptx/What_Child_Is_This.pptx
+++ b/output_pptx/What_Child_Is_This.pptx
@@ -3183,6 +3183,76 @@
           </a:p>
         </p:txBody>
       </p:sp>
+      <p:sp>
+        <p:nvSpPr>
+          <p:cNvPr id="4" name="TextBox 3"/>
+          <p:cNvSpPr txBox="1"/>
+          <p:nvPr/>
+        </p:nvSpPr>
+        <p:spPr>
+          <a:xfrm>
+            <a:off x="640080" y="4128516"/>
+            <a:ext cx="10911535" cy="310896"/>
+          </a:xfrm>
+          <a:prstGeom prst="rect">
+            <a:avLst/>
+          </a:prstGeom>
+          <a:noFill/>
+        </p:spPr>
+        <p:txBody>
+          <a:bodyPr wrap="square">
+            <a:spAutoFit/>
+          </a:bodyPr>
+          <a:lstStyle/>
+          <a:p>
+            <a:pPr algn="ctr"/>
+            <a:r>
+              <a:rPr sz="2000" b="0" i="0">
+                <a:solidFill>
+                  <a:srgbClr val="828282"/>
+                </a:solidFill>
+                <a:latin typeface="Arial"/>
+              </a:rPr>
+              <a:t>この子どもは誰か</a:t>
+            </a:r>
+          </a:p>
+        </p:txBody>
+      </p:sp>
+      <p:sp>
+        <p:nvSpPr>
+          <p:cNvPr id="5" name="TextBox 4"/>
+          <p:cNvSpPr txBox="1"/>
+          <p:nvPr/>
+        </p:nvSpPr>
+        <p:spPr>
+          <a:xfrm>
+            <a:off x="640080" y="4494276"/>
+            <a:ext cx="10911535" cy="310896"/>
+          </a:xfrm>
+          <a:prstGeom prst="rect">
+            <a:avLst/>
+          </a:prstGeom>
+          <a:noFill/>
+        </p:spPr>
+        <p:txBody>
+          <a:bodyPr wrap="square">
+            <a:spAutoFit/>
+          </a:bodyPr>
+          <a:lstStyle/>
+          <a:p>
+            <a:pPr algn="ctr"/>
+            <a:r>
+              <a:rPr sz="2000" b="0" i="0">
+                <a:solidFill>
+                  <a:srgbClr val="828282"/>
+                </a:solidFill>
+                <a:latin typeface="Arial"/>
+              </a:rPr>
+              <a:t>この子どもは誰か、マリアのひざで休み</a:t>
+            </a:r>
+          </a:p>
+        </p:txBody>
+      </p:sp>
     </p:spTree>
   </p:cSld>
   <p:clrMapOvr>
@@ -3279,6 +3349,76 @@
           </a:p>
         </p:txBody>
       </p:sp>
+      <p:sp>
+        <p:nvSpPr>
+          <p:cNvPr id="4" name="TextBox 3"/>
+          <p:cNvSpPr txBox="1"/>
+          <p:nvPr/>
+        </p:nvSpPr>
+        <p:spPr>
+          <a:xfrm>
+            <a:off x="640080" y="4128516"/>
+            <a:ext cx="10911535" cy="310896"/>
+          </a:xfrm>
+          <a:prstGeom prst="rect">
+            <a:avLst/>
+          </a:prstGeom>
+          <a:noFill/>
+        </p:spPr>
+        <p:txBody>
+          <a:bodyPr wrap="square">
+            <a:spAutoFit/>
+          </a:bodyPr>
+          <a:lstStyle/>
+          <a:p>
+            <a:pPr algn="ctr"/>
+            <a:r>
+              <a:rPr sz="2000" b="0" i="0">
+                <a:solidFill>
+                  <a:srgbClr val="828282"/>
+                </a:solidFill>
+                <a:latin typeface="Arial"/>
+              </a:rPr>
+              <a:t>来なさい、農民たちと王たちよ、ひれ伏しなさい</a:t>
+            </a:r>
+          </a:p>
+        </p:txBody>
+      </p:sp>
+      <p:sp>
+        <p:nvSpPr>
+          <p:cNvPr id="5" name="TextBox 4"/>
+          <p:cNvSpPr txBox="1"/>
+          <p:nvPr/>
+        </p:nvSpPr>
+        <p:spPr>
+          <a:xfrm>
+            <a:off x="640080" y="4494276"/>
+            <a:ext cx="10911535" cy="310896"/>
+          </a:xfrm>
+          <a:prstGeom prst="rect">
+            <a:avLst/>
+          </a:prstGeom>
+          <a:noFill/>
+        </p:spPr>
+        <p:txBody>
+          <a:bodyPr wrap="square">
+            <a:spAutoFit/>
+          </a:bodyPr>
+          <a:lstStyle/>
+          <a:p>
+            <a:pPr algn="ctr"/>
+            <a:r>
+              <a:rPr sz="2000" b="0" i="0">
+                <a:solidFill>
+                  <a:srgbClr val="828282"/>
+                </a:solidFill>
+                <a:latin typeface="Arial"/>
+              </a:rPr>
+              <a:t>王の王、救いをもたらす</a:t>
+            </a:r>
+          </a:p>
+        </p:txBody>
+      </p:sp>
     </p:spTree>
   </p:cSld>
   <p:clrMapOvr>
@@ -3340,6 +3480,41 @@
           </a:p>
         </p:txBody>
       </p:sp>
+      <p:sp>
+        <p:nvSpPr>
+          <p:cNvPr id="3" name="TextBox 2"/>
+          <p:cNvSpPr txBox="1"/>
+          <p:nvPr/>
+        </p:nvSpPr>
+        <p:spPr>
+          <a:xfrm>
+            <a:off x="640080" y="3845052"/>
+            <a:ext cx="10911535" cy="310896"/>
+          </a:xfrm>
+          <a:prstGeom prst="rect">
+            <a:avLst/>
+          </a:prstGeom>
+          <a:noFill/>
+        </p:spPr>
+        <p:txBody>
+          <a:bodyPr wrap="square">
+            <a:spAutoFit/>
+          </a:bodyPr>
+          <a:lstStyle/>
+          <a:p>
+            <a:pPr algn="ctr"/>
+            <a:r>
+              <a:rPr sz="2000" b="0" i="0">
+                <a:solidFill>
+                  <a:srgbClr val="828282"/>
+                </a:solidFill>
+                <a:latin typeface="Arial"/>
+              </a:rPr>
+              <a:t>愛する心をもって彼を王座に着かせなさい</a:t>
+            </a:r>
+          </a:p>
+        </p:txBody>
+      </p:sp>
     </p:spTree>
   </p:cSld>
   <p:clrMapOvr>
@@ -4380,6 +4555,76 @@
           </a:p>
         </p:txBody>
       </p:sp>
+      <p:sp>
+        <p:nvSpPr>
+          <p:cNvPr id="4" name="TextBox 3"/>
+          <p:cNvSpPr txBox="1"/>
+          <p:nvPr/>
+        </p:nvSpPr>
+        <p:spPr>
+          <a:xfrm>
+            <a:off x="640080" y="4128516"/>
+            <a:ext cx="10911535" cy="310896"/>
+          </a:xfrm>
+          <a:prstGeom prst="rect">
+            <a:avLst/>
+          </a:prstGeom>
+          <a:noFill/>
+        </p:spPr>
+        <p:txBody>
+          <a:bodyPr wrap="square">
+            <a:spAutoFit/>
+          </a:bodyPr>
+          <a:lstStyle/>
+          <a:p>
+            <a:pPr algn="ctr"/>
+            <a:r>
+              <a:rPr sz="2000" b="0" i="0">
+                <a:solidFill>
+                  <a:srgbClr val="828282"/>
+                </a:solidFill>
+                <a:latin typeface="Arial"/>
+              </a:rPr>
+              <a:t>羊飼いたちが守り、天使たちが歌う方</a:t>
+            </a:r>
+          </a:p>
+        </p:txBody>
+      </p:sp>
+      <p:sp>
+        <p:nvSpPr>
+          <p:cNvPr id="5" name="TextBox 4"/>
+          <p:cNvSpPr txBox="1"/>
+          <p:nvPr/>
+        </p:nvSpPr>
+        <p:spPr>
+          <a:xfrm>
+            <a:off x="640080" y="4494276"/>
+            <a:ext cx="10911535" cy="310896"/>
+          </a:xfrm>
+          <a:prstGeom prst="rect">
+            <a:avLst/>
+          </a:prstGeom>
+          <a:noFill/>
+        </p:spPr>
+        <p:txBody>
+          <a:bodyPr wrap="square">
+            <a:spAutoFit/>
+          </a:bodyPr>
+          <a:lstStyle/>
+          <a:p>
+            <a:pPr algn="ctr"/>
+            <a:r>
+              <a:rPr sz="2000" b="0" i="0">
+                <a:solidFill>
+                  <a:srgbClr val="828282"/>
+                </a:solidFill>
+                <a:latin typeface="Arial"/>
+              </a:rPr>
+              <a:t>急ぎなさい、彼に賛美をもたらしなさい</a:t>
+            </a:r>
+          </a:p>
+        </p:txBody>
+      </p:sp>
     </p:spTree>
   </p:cSld>
   <p:clrMapOvr>
@@ -4476,6 +4721,76 @@
           </a:p>
         </p:txBody>
       </p:sp>
+      <p:sp>
+        <p:nvSpPr>
+          <p:cNvPr id="4" name="TextBox 3"/>
+          <p:cNvSpPr txBox="1"/>
+          <p:nvPr/>
+        </p:nvSpPr>
+        <p:spPr>
+          <a:xfrm>
+            <a:off x="640080" y="4128516"/>
+            <a:ext cx="10911535" cy="310896"/>
+          </a:xfrm>
+          <a:prstGeom prst="rect">
+            <a:avLst/>
+          </a:prstGeom>
+          <a:noFill/>
+        </p:spPr>
+        <p:txBody>
+          <a:bodyPr wrap="square">
+            <a:spAutoFit/>
+          </a:bodyPr>
+          <a:lstStyle/>
+          <a:p>
+            <a:pPr algn="ctr"/>
+            <a:r>
+              <a:rPr sz="2000" b="0" i="0">
+                <a:solidFill>
+                  <a:srgbClr val="828282"/>
+                </a:solidFill>
+                <a:latin typeface="Arial"/>
+              </a:rPr>
+              <a:t>みどりご、マリアの子</a:t>
+            </a:r>
+          </a:p>
+        </p:txBody>
+      </p:sp>
+      <p:sp>
+        <p:nvSpPr>
+          <p:cNvPr id="5" name="TextBox 4"/>
+          <p:cNvSpPr txBox="1"/>
+          <p:nvPr/>
+        </p:nvSpPr>
+        <p:spPr>
+          <a:xfrm>
+            <a:off x="640080" y="4494276"/>
+            <a:ext cx="10911535" cy="310896"/>
+          </a:xfrm>
+          <a:prstGeom prst="rect">
+            <a:avLst/>
+          </a:prstGeom>
+          <a:noFill/>
+        </p:spPr>
+        <p:txBody>
+          <a:bodyPr wrap="square">
+            <a:spAutoFit/>
+          </a:bodyPr>
+          <a:lstStyle/>
+          <a:p>
+            <a:pPr algn="ctr"/>
+            <a:r>
+              <a:rPr sz="2000" b="0" i="0">
+                <a:solidFill>
+                  <a:srgbClr val="828282"/>
+                </a:solidFill>
+                <a:latin typeface="Arial"/>
+              </a:rPr>
+              <a:t>羊飼いたちが守り、天使たちが歌う方</a:t>
+            </a:r>
+          </a:p>
+        </p:txBody>
+      </p:sp>
     </p:spTree>
   </p:cSld>
   <p:clrMapOvr>
@@ -4572,6 +4887,76 @@
           </a:p>
         </p:txBody>
       </p:sp>
+      <p:sp>
+        <p:nvSpPr>
+          <p:cNvPr id="4" name="TextBox 3"/>
+          <p:cNvSpPr txBox="1"/>
+          <p:nvPr/>
+        </p:nvSpPr>
+        <p:spPr>
+          <a:xfrm>
+            <a:off x="640080" y="4128516"/>
+            <a:ext cx="10911535" cy="310896"/>
+          </a:xfrm>
+          <a:prstGeom prst="rect">
+            <a:avLst/>
+          </a:prstGeom>
+          <a:noFill/>
+        </p:spPr>
+        <p:txBody>
+          <a:bodyPr wrap="square">
+            <a:spAutoFit/>
+          </a:bodyPr>
+          <a:lstStyle/>
+          <a:p>
+            <a:pPr algn="ctr"/>
+            <a:r>
+              <a:rPr sz="2000" b="0" i="0">
+                <a:solidFill>
+                  <a:srgbClr val="828282"/>
+                </a:solidFill>
+                <a:latin typeface="Arial"/>
+              </a:rPr>
+              <a:t>急ぎなさい、彼に賛美をもたらしなさい</a:t>
+            </a:r>
+          </a:p>
+        </p:txBody>
+      </p:sp>
+      <p:sp>
+        <p:nvSpPr>
+          <p:cNvPr id="5" name="TextBox 4"/>
+          <p:cNvSpPr txBox="1"/>
+          <p:nvPr/>
+        </p:nvSpPr>
+        <p:spPr>
+          <a:xfrm>
+            <a:off x="640080" y="4494276"/>
+            <a:ext cx="10911535" cy="310896"/>
+          </a:xfrm>
+          <a:prstGeom prst="rect">
+            <a:avLst/>
+          </a:prstGeom>
+          <a:noFill/>
+        </p:spPr>
+        <p:txBody>
+          <a:bodyPr wrap="square">
+            <a:spAutoFit/>
+          </a:bodyPr>
+          <a:lstStyle/>
+          <a:p>
+            <a:pPr algn="ctr"/>
+            <a:r>
+              <a:rPr sz="2000" b="0" i="0">
+                <a:solidFill>
+                  <a:srgbClr val="828282"/>
+                </a:solidFill>
+                <a:latin typeface="Arial"/>
+              </a:rPr>
+              <a:t>みどりご、マリアの子</a:t>
+            </a:r>
+          </a:p>
+        </p:txBody>
+      </p:sp>
     </p:spTree>
   </p:cSld>
   <p:clrMapOvr>
@@ -4668,6 +5053,76 @@
           </a:p>
         </p:txBody>
       </p:sp>
+      <p:sp>
+        <p:nvSpPr>
+          <p:cNvPr id="4" name="TextBox 3"/>
+          <p:cNvSpPr txBox="1"/>
+          <p:nvPr/>
+        </p:nvSpPr>
+        <p:spPr>
+          <a:xfrm>
+            <a:off x="640080" y="4128516"/>
+            <a:ext cx="10911535" cy="310896"/>
+          </a:xfrm>
+          <a:prstGeom prst="rect">
+            <a:avLst/>
+          </a:prstGeom>
+          <a:noFill/>
+        </p:spPr>
+        <p:txBody>
+          <a:bodyPr wrap="square">
+            <a:spAutoFit/>
+          </a:bodyPr>
+          <a:lstStyle/>
+          <a:p>
+            <a:pPr algn="ctr"/>
+            <a:r>
+              <a:rPr sz="2000" b="0" i="0">
+                <a:solidFill>
+                  <a:srgbClr val="828282"/>
+                </a:solidFill>
+                <a:latin typeface="Arial"/>
+              </a:rPr>
+              <a:t>マリアのひざで眠っている</a:t>
+            </a:r>
+          </a:p>
+        </p:txBody>
+      </p:sp>
+      <p:sp>
+        <p:nvSpPr>
+          <p:cNvPr id="5" name="TextBox 4"/>
+          <p:cNvSpPr txBox="1"/>
+          <p:nvPr/>
+        </p:nvSpPr>
+        <p:spPr>
+          <a:xfrm>
+            <a:off x="640080" y="4494276"/>
+            <a:ext cx="10911535" cy="310896"/>
+          </a:xfrm>
+          <a:prstGeom prst="rect">
+            <a:avLst/>
+          </a:prstGeom>
+          <a:noFill/>
+        </p:spPr>
+        <p:txBody>
+          <a:bodyPr wrap="square">
+            <a:spAutoFit/>
+          </a:bodyPr>
+          <a:lstStyle/>
+          <a:p>
+            <a:pPr algn="ctr"/>
+            <a:r>
+              <a:rPr sz="2000" b="0" i="0">
+                <a:solidFill>
+                  <a:srgbClr val="828282"/>
+                </a:solidFill>
+                <a:latin typeface="Arial"/>
+              </a:rPr>
+              <a:t>天使たちが甘い賛美で迎える方</a:t>
+            </a:r>
+          </a:p>
+        </p:txBody>
+      </p:sp>
     </p:spTree>
   </p:cSld>
   <p:clrMapOvr>
@@ -4764,6 +5219,76 @@
           </a:p>
         </p:txBody>
       </p:sp>
+      <p:sp>
+        <p:nvSpPr>
+          <p:cNvPr id="4" name="TextBox 3"/>
+          <p:cNvSpPr txBox="1"/>
+          <p:nvPr/>
+        </p:nvSpPr>
+        <p:spPr>
+          <a:xfrm>
+            <a:off x="640080" y="4128516"/>
+            <a:ext cx="10911535" cy="310896"/>
+          </a:xfrm>
+          <a:prstGeom prst="rect">
+            <a:avLst/>
+          </a:prstGeom>
+          <a:noFill/>
+        </p:spPr>
+        <p:txBody>
+          <a:bodyPr wrap="square">
+            <a:spAutoFit/>
+          </a:bodyPr>
+          <a:lstStyle/>
+          <a:p>
+            <a:pPr algn="ctr"/>
+            <a:r>
+              <a:rPr sz="2000" b="0" i="0">
+                <a:solidFill>
+                  <a:srgbClr val="828282"/>
+                </a:solidFill>
+                <a:latin typeface="Arial"/>
+              </a:rPr>
+              <a:t>羊飼いたちが見守る間に</a:t>
+            </a:r>
+          </a:p>
+        </p:txBody>
+      </p:sp>
+      <p:sp>
+        <p:nvSpPr>
+          <p:cNvPr id="5" name="TextBox 4"/>
+          <p:cNvSpPr txBox="1"/>
+          <p:nvPr/>
+        </p:nvSpPr>
+        <p:spPr>
+          <a:xfrm>
+            <a:off x="640080" y="4494276"/>
+            <a:ext cx="10911535" cy="310896"/>
+          </a:xfrm>
+          <a:prstGeom prst="rect">
+            <a:avLst/>
+          </a:prstGeom>
+          <a:noFill/>
+        </p:spPr>
+        <p:txBody>
+          <a:bodyPr wrap="square">
+            <a:spAutoFit/>
+          </a:bodyPr>
+          <a:lstStyle/>
+          <a:p>
+            <a:pPr algn="ctr"/>
+            <a:r>
+              <a:rPr sz="2000" b="0" i="0">
+                <a:solidFill>
+                  <a:srgbClr val="828282"/>
+                </a:solidFill>
+                <a:latin typeface="Arial"/>
+              </a:rPr>
+              <a:t>これ、これはキリスト、王である</a:t>
+            </a:r>
+          </a:p>
+        </p:txBody>
+      </p:sp>
     </p:spTree>
   </p:cSld>
   <p:clrMapOvr>
@@ -4860,6 +5385,76 @@
           </a:p>
         </p:txBody>
       </p:sp>
+      <p:sp>
+        <p:nvSpPr>
+          <p:cNvPr id="4" name="TextBox 3"/>
+          <p:cNvSpPr txBox="1"/>
+          <p:nvPr/>
+        </p:nvSpPr>
+        <p:spPr>
+          <a:xfrm>
+            <a:off x="640080" y="4128516"/>
+            <a:ext cx="10911535" cy="310896"/>
+          </a:xfrm>
+          <a:prstGeom prst="rect">
+            <a:avLst/>
+          </a:prstGeom>
+          <a:noFill/>
+        </p:spPr>
+        <p:txBody>
+          <a:bodyPr wrap="square">
+            <a:spAutoFit/>
+          </a:bodyPr>
+          <a:lstStyle/>
+          <a:p>
+            <a:pPr algn="ctr"/>
+            <a:r>
+              <a:rPr sz="2000" b="0" i="0">
+                <a:solidFill>
+                  <a:srgbClr val="828282"/>
+                </a:solidFill>
+                <a:latin typeface="Arial"/>
+              </a:rPr>
+              <a:t>羊飼いたちが守り、天使たちが歌う方</a:t>
+            </a:r>
+          </a:p>
+        </p:txBody>
+      </p:sp>
+      <p:sp>
+        <p:nvSpPr>
+          <p:cNvPr id="5" name="TextBox 4"/>
+          <p:cNvSpPr txBox="1"/>
+          <p:nvPr/>
+        </p:nvSpPr>
+        <p:spPr>
+          <a:xfrm>
+            <a:off x="640080" y="4494276"/>
+            <a:ext cx="10911535" cy="310896"/>
+          </a:xfrm>
+          <a:prstGeom prst="rect">
+            <a:avLst/>
+          </a:prstGeom>
+          <a:noFill/>
+        </p:spPr>
+        <p:txBody>
+          <a:bodyPr wrap="square">
+            <a:spAutoFit/>
+          </a:bodyPr>
+          <a:lstStyle/>
+          <a:p>
+            <a:pPr algn="ctr"/>
+            <a:r>
+              <a:rPr sz="2000" b="0" i="0">
+                <a:solidFill>
+                  <a:srgbClr val="828282"/>
+                </a:solidFill>
+                <a:latin typeface="Arial"/>
+              </a:rPr>
+              <a:t>急ぎなさい、彼に賛美をもたらしなさい</a:t>
+            </a:r>
+          </a:p>
+        </p:txBody>
+      </p:sp>
     </p:spTree>
   </p:cSld>
   <p:clrMapOvr>
@@ -4952,6 +5547,76 @@
                 <a:latin typeface="Arial"/>
               </a:rPr>
               <a:t>Por que jaz em tão humilde lugar</a:t>
+            </a:r>
+          </a:p>
+        </p:txBody>
+      </p:sp>
+      <p:sp>
+        <p:nvSpPr>
+          <p:cNvPr id="4" name="TextBox 3"/>
+          <p:cNvSpPr txBox="1"/>
+          <p:nvPr/>
+        </p:nvSpPr>
+        <p:spPr>
+          <a:xfrm>
+            <a:off x="640080" y="4128516"/>
+            <a:ext cx="10911535" cy="310896"/>
+          </a:xfrm>
+          <a:prstGeom prst="rect">
+            <a:avLst/>
+          </a:prstGeom>
+          <a:noFill/>
+        </p:spPr>
+        <p:txBody>
+          <a:bodyPr wrap="square">
+            <a:spAutoFit/>
+          </a:bodyPr>
+          <a:lstStyle/>
+          <a:p>
+            <a:pPr algn="ctr"/>
+            <a:r>
+              <a:rPr sz="2000" b="0" i="0">
+                <a:solidFill>
+                  <a:srgbClr val="828282"/>
+                </a:solidFill>
+                <a:latin typeface="Arial"/>
+              </a:rPr>
+              <a:t>みどりご、マリアの子</a:t>
+            </a:r>
+          </a:p>
+        </p:txBody>
+      </p:sp>
+      <p:sp>
+        <p:nvSpPr>
+          <p:cNvPr id="5" name="TextBox 4"/>
+          <p:cNvSpPr txBox="1"/>
+          <p:nvPr/>
+        </p:nvSpPr>
+        <p:spPr>
+          <a:xfrm>
+            <a:off x="640080" y="4494276"/>
+            <a:ext cx="10911535" cy="310896"/>
+          </a:xfrm>
+          <a:prstGeom prst="rect">
+            <a:avLst/>
+          </a:prstGeom>
+          <a:noFill/>
+        </p:spPr>
+        <p:txBody>
+          <a:bodyPr wrap="square">
+            <a:spAutoFit/>
+          </a:bodyPr>
+          <a:lstStyle/>
+          <a:p>
+            <a:pPr algn="ctr"/>
+            <a:r>
+              <a:rPr sz="2000" b="0" i="0">
+                <a:solidFill>
+                  <a:srgbClr val="828282"/>
+                </a:solidFill>
+                <a:latin typeface="Arial"/>
+              </a:rPr>
+              <a:t>なぜこのような謙虚な場所に横たわるのか</a:t>
             </a:r>
           </a:p>
         </p:txBody>
